--- a/topic08-higher-order-functions/unit-08a-lectures/talk-4/d-function-comp.pptx
+++ b/topic08-higher-order-functions/unit-08a-lectures/talk-4/d-function-comp.pptx
@@ -534,10 +534,10 @@
           </a:ln>
           <a:extLst>
             <a:ext uri="{FAA26D3D-D897-4be2-8F04-BA451C77F1D7}">
-              <ma14:placeholderFlag xmlns:ma14="http://schemas.microsoft.com/office/mac/drawingml/2011/main" xmlns="" val="1"/>
+              <ma14:placeholderFlag xmlns="" xmlns:ma14="http://schemas.microsoft.com/office/mac/drawingml/2011/main" val="1"/>
             </a:ext>
             <a:ext uri="{909E8E84-426E-40dd-AFC4-6F175D3DCCD1}">
-              <a14:hiddenFill xmlns:a14="http://schemas.microsoft.com/office/drawing/2010/main" xmlns="">
+              <a14:hiddenFill xmlns="" xmlns:a14="http://schemas.microsoft.com/office/drawing/2010/main">
                 <a:solidFill>
                   <a:srgbClr val="FFFFFF"/>
                 </a:solidFill>
@@ -1413,7 +1413,7 @@
             <a:fld id="{08B9EBBA-996F-894A-B54A-D6246ED52CEA}" type="datetimeFigureOut">
               <a:rPr lang="en-US" smtClean="0"/>
               <a:pPr/>
-              <a:t>3/26/25</a:t>
+              <a:t>3/7/26</a:t>
             </a:fld>
             <a:endParaRPr lang="en-US" dirty="0"/>
           </a:p>
@@ -1835,7 +1835,7 @@
             <a:fld id="{09B482E8-6E0E-1B4F-B1FD-C69DB9E858D9}" type="datetimeFigureOut">
               <a:rPr lang="en-US" smtClean="0"/>
               <a:pPr/>
-              <a:t>3/26/25</a:t>
+              <a:t>3/7/26</a:t>
             </a:fld>
             <a:endParaRPr lang="en-US" dirty="0"/>
           </a:p>
@@ -2179,7 +2179,7 @@
             <a:fld id="{09B482E8-6E0E-1B4F-B1FD-C69DB9E858D9}" type="datetimeFigureOut">
               <a:rPr lang="en-US" smtClean="0"/>
               <a:pPr/>
-              <a:t>3/26/25</a:t>
+              <a:t>3/7/26</a:t>
             </a:fld>
             <a:endParaRPr lang="en-US" dirty="0"/>
           </a:p>
@@ -2592,7 +2592,7 @@
             <a:fld id="{09B482E8-6E0E-1B4F-B1FD-C69DB9E858D9}" type="datetimeFigureOut">
               <a:rPr lang="en-US" smtClean="0"/>
               <a:pPr/>
-              <a:t>3/26/25</a:t>
+              <a:t>3/7/26</a:t>
             </a:fld>
             <a:endParaRPr lang="en-US" dirty="0"/>
           </a:p>
@@ -3168,7 +3168,7 @@
             <a:fld id="{09B482E8-6E0E-1B4F-B1FD-C69DB9E858D9}" type="datetimeFigureOut">
               <a:rPr lang="en-US" smtClean="0"/>
               <a:pPr/>
-              <a:t>3/26/25</a:t>
+              <a:t>3/7/26</a:t>
             </a:fld>
             <a:endParaRPr lang="en-US" dirty="0"/>
           </a:p>
@@ -3857,7 +3857,7 @@
             <a:fld id="{09B482E8-6E0E-1B4F-B1FD-C69DB9E858D9}" type="datetimeFigureOut">
               <a:rPr lang="en-US" smtClean="0"/>
               <a:pPr/>
-              <a:t>3/26/25</a:t>
+              <a:t>3/7/26</a:t>
             </a:fld>
             <a:endParaRPr lang="en-US" dirty="0"/>
           </a:p>
@@ -4778,7 +4778,7 @@
             <a:fld id="{09B482E8-6E0E-1B4F-B1FD-C69DB9E858D9}" type="datetimeFigureOut">
               <a:rPr lang="en-US" smtClean="0"/>
               <a:pPr/>
-              <a:t>3/26/25</a:t>
+              <a:t>3/7/26</a:t>
             </a:fld>
             <a:endParaRPr lang="en-US" dirty="0"/>
           </a:p>
@@ -5099,7 +5099,7 @@
             <a:fld id="{09B482E8-6E0E-1B4F-B1FD-C69DB9E858D9}" type="datetimeFigureOut">
               <a:rPr lang="en-US" smtClean="0"/>
               <a:pPr/>
-              <a:t>3/26/25</a:t>
+              <a:t>3/7/26</a:t>
             </a:fld>
             <a:endParaRPr lang="en-US" dirty="0"/>
           </a:p>
@@ -5370,7 +5370,7 @@
             <a:fld id="{09B482E8-6E0E-1B4F-B1FD-C69DB9E858D9}" type="datetimeFigureOut">
               <a:rPr lang="en-US" smtClean="0"/>
               <a:pPr/>
-              <a:t>3/26/25</a:t>
+              <a:t>3/7/26</a:t>
             </a:fld>
             <a:endParaRPr lang="en-US" dirty="0"/>
           </a:p>
@@ -5568,6 +5568,13 @@
             <a:schemeClr val="lt1"/>
           </a:fontRef>
         </p:style>
+        <p:txBody>
+          <a:bodyPr/>
+          <a:lstStyle/>
+          <a:p>
+            <a:endParaRPr lang="en-US"/>
+          </a:p>
+        </p:txBody>
       </p:sp>
       <p:sp>
         <p:nvSpPr>
@@ -5606,6 +5613,13 @@
             <a:schemeClr val="lt1"/>
           </a:fontRef>
         </p:style>
+        <p:txBody>
+          <a:bodyPr/>
+          <a:lstStyle/>
+          <a:p>
+            <a:endParaRPr lang="en-US"/>
+          </a:p>
+        </p:txBody>
       </p:sp>
       <p:sp>
         <p:nvSpPr>
@@ -5700,7 +5714,7 @@
             <a:fld id="{09B482E8-6E0E-1B4F-B1FD-C69DB9E858D9}" type="datetimeFigureOut">
               <a:rPr lang="en-US" smtClean="0"/>
               <a:pPr/>
-              <a:t>3/26/25</a:t>
+              <a:t>3/7/26</a:t>
             </a:fld>
             <a:endParaRPr lang="en-US" dirty="0"/>
           </a:p>
@@ -6096,7 +6110,7 @@
             <a:fld id="{8DFA1846-DA80-1C48-A609-854EA85C59AD}" type="datetimeFigureOut">
               <a:rPr lang="en-US" smtClean="0"/>
               <a:pPr/>
-              <a:t>3/26/25</a:t>
+              <a:t>3/7/26</a:t>
             </a:fld>
             <a:endParaRPr lang="en-US" dirty="0"/>
           </a:p>
@@ -6479,7 +6493,7 @@
             <a:fld id="{09B482E8-6E0E-1B4F-B1FD-C69DB9E858D9}" type="datetimeFigureOut">
               <a:rPr lang="en-US" smtClean="0"/>
               <a:pPr/>
-              <a:t>3/26/25</a:t>
+              <a:t>3/7/26</a:t>
             </a:fld>
             <a:endParaRPr lang="en-US" dirty="0"/>
           </a:p>
@@ -6992,7 +7006,7 @@
             <a:fld id="{09B482E8-6E0E-1B4F-B1FD-C69DB9E858D9}" type="datetimeFigureOut">
               <a:rPr lang="en-US" smtClean="0"/>
               <a:pPr/>
-              <a:t>3/26/25</a:t>
+              <a:t>3/7/26</a:t>
             </a:fld>
             <a:endParaRPr lang="en-US" dirty="0"/>
           </a:p>
@@ -7176,6 +7190,13 @@
             <a:schemeClr val="lt1"/>
           </a:fontRef>
         </p:style>
+        <p:txBody>
+          <a:bodyPr/>
+          <a:lstStyle/>
+          <a:p>
+            <a:endParaRPr lang="en-US"/>
+          </a:p>
+        </p:txBody>
       </p:sp>
       <p:sp>
         <p:nvSpPr>
@@ -7214,6 +7235,13 @@
             <a:schemeClr val="lt1"/>
           </a:fontRef>
         </p:style>
+        <p:txBody>
+          <a:bodyPr/>
+          <a:lstStyle/>
+          <a:p>
+            <a:endParaRPr lang="en-US"/>
+          </a:p>
+        </p:txBody>
       </p:sp>
       <p:sp>
         <p:nvSpPr>
@@ -7256,7 +7284,7 @@
             <a:fld id="{F13A34C8-038E-2045-AF43-DF7DBB8E0E9E}" type="datetimeFigureOut">
               <a:rPr lang="en-US" smtClean="0"/>
               <a:pPr/>
-              <a:t>3/26/25</a:t>
+              <a:t>3/7/26</a:t>
             </a:fld>
             <a:endParaRPr lang="en-US" dirty="0"/>
           </a:p>
@@ -7407,6 +7435,13 @@
             <a:schemeClr val="lt1"/>
           </a:fontRef>
         </p:style>
+        <p:txBody>
+          <a:bodyPr/>
+          <a:lstStyle/>
+          <a:p>
+            <a:endParaRPr lang="en-US"/>
+          </a:p>
+        </p:txBody>
       </p:sp>
       <p:sp>
         <p:nvSpPr>
@@ -7426,7 +7461,7 @@
             <a:fld id="{8818C68F-D26B-8F47-958C-23B49CF8A634}" type="datetimeFigureOut">
               <a:rPr lang="en-US" smtClean="0"/>
               <a:pPr/>
-              <a:t>3/26/25</a:t>
+              <a:t>3/7/26</a:t>
             </a:fld>
             <a:endParaRPr lang="en-US" dirty="0"/>
           </a:p>
@@ -7823,7 +7858,7 @@
             <a:fld id="{09B482E8-6E0E-1B4F-B1FD-C69DB9E858D9}" type="datetimeFigureOut">
               <a:rPr lang="en-US" smtClean="0"/>
               <a:pPr/>
-              <a:t>3/26/25</a:t>
+              <a:t>3/7/26</a:t>
             </a:fld>
             <a:endParaRPr lang="en-US" dirty="0"/>
           </a:p>
@@ -8239,7 +8274,7 @@
             <a:fld id="{09B482E8-6E0E-1B4F-B1FD-C69DB9E858D9}" type="datetimeFigureOut">
               <a:rPr lang="en-US" smtClean="0"/>
               <a:pPr/>
-              <a:t>3/26/25</a:t>
+              <a:t>3/7/26</a:t>
             </a:fld>
             <a:endParaRPr lang="en-US" dirty="0"/>
           </a:p>
@@ -8490,7 +8525,7 @@
             <a:fld id="{09B482E8-6E0E-1B4F-B1FD-C69DB9E858D9}" type="datetimeFigureOut">
               <a:rPr lang="en-US" smtClean="0"/>
               <a:pPr/>
-              <a:t>3/26/25</a:t>
+              <a:t>3/7/26</a:t>
             </a:fld>
             <a:endParaRPr lang="en-US" dirty="0"/>
           </a:p>
@@ -8927,14 +8962,14 @@
           <a:noFill/>
           <a:extLst>
             <a:ext uri="{909E8E84-426E-40dd-AFC4-6F175D3DCCD1}">
-              <a14:hiddenFill xmlns:a14="http://schemas.microsoft.com/office/drawing/2010/main" xmlns="">
+              <a14:hiddenFill xmlns="" xmlns:a14="http://schemas.microsoft.com/office/drawing/2010/main">
                 <a:solidFill>
                   <a:srgbClr val="FFFFFF"/>
                 </a:solidFill>
               </a14:hiddenFill>
             </a:ext>
             <a:ext uri="{91240B29-F687-4f45-9708-019B960494DF}">
-              <a14:hiddenLine xmlns:a14="http://schemas.microsoft.com/office/drawing/2010/main" xmlns="" w="9525">
+              <a14:hiddenLine xmlns="" xmlns:a14="http://schemas.microsoft.com/office/drawing/2010/main" w="9525">
                 <a:solidFill>
                   <a:srgbClr val="000000"/>
                 </a:solidFill>
@@ -9142,7 +9177,7 @@
               <a:rPr kumimoji="1" lang="en-US" sz="3200" dirty="0">
                 <a:cs typeface="+mn-cs"/>
               </a:rPr>
-              <a:t>Chapter 8.4 </a:t>
+              <a:t>Topic 8.4 </a:t>
             </a:r>
           </a:p>
           <a:p>
@@ -9193,14 +9228,14 @@
           </a:ln>
           <a:extLst>
             <a:ext uri="{909E8E84-426E-40dd-AFC4-6F175D3DCCD1}">
-              <a14:hiddenFill xmlns:a14="http://schemas.microsoft.com/office/drawing/2010/main" xmlns="">
+              <a14:hiddenFill xmlns="" xmlns:a14="http://schemas.microsoft.com/office/drawing/2010/main">
                 <a:solidFill>
                   <a:srgbClr val="FFFFFF"/>
                 </a:solidFill>
               </a14:hiddenFill>
             </a:ext>
             <a:ext uri="{91240B29-F687-4f45-9708-019B960494DF}">
-              <a14:hiddenLine xmlns:a14="http://schemas.microsoft.com/office/drawing/2010/main" xmlns="" w="9525">
+              <a14:hiddenLine xmlns="" xmlns:a14="http://schemas.microsoft.com/office/drawing/2010/main" w="9525">
                 <a:solidFill>
                   <a:srgbClr val="000000"/>
                 </a:solidFill>
@@ -11016,7 +11051,7 @@
                             </p:stCondLst>
                             <p:childTnLst>
                               <p:par>
-                                <p:cTn id="23" presetID="2" presetClass="entr" presetSubtype="4" fill="hold" nodeType="clickEffect">
+                                <p:cTn id="23" presetID="2" presetClass="entr" presetSubtype="4" fill="hold" grpId="0" nodeType="clickEffect">
                                   <p:stCondLst>
                                     <p:cond delay="0"/>
                                   </p:stCondLst>
@@ -11029,7 +11064,9 @@
                                           </p:stCondLst>
                                         </p:cTn>
                                         <p:tgtEl>
-                                          <p:spTgt spid="11"/>
+                                          <p:spTgt spid="9">
+                                            <p:bg/>
+                                          </p:spTgt>
                                         </p:tgtEl>
                                         <p:attrNameLst>
                                           <p:attrName>style.visibility</p:attrName>
@@ -11043,7 +11080,9 @@
                                       <p:cBhvr additive="base">
                                         <p:cTn id="25" dur="500" fill="hold"/>
                                         <p:tgtEl>
-                                          <p:spTgt spid="11"/>
+                                          <p:spTgt spid="9">
+                                            <p:bg/>
+                                          </p:spTgt>
                                         </p:tgtEl>
                                         <p:attrNameLst>
                                           <p:attrName>ppt_x</p:attrName>
@@ -11066,7 +11105,9 @@
                                       <p:cBhvr additive="base">
                                         <p:cTn id="26" dur="500" fill="hold"/>
                                         <p:tgtEl>
-                                          <p:spTgt spid="11"/>
+                                          <p:spTgt spid="9">
+                                            <p:bg/>
+                                          </p:spTgt>
                                         </p:tgtEl>
                                         <p:attrNameLst>
                                           <p:attrName>ppt_y</p:attrName>
@@ -11089,7 +11130,7 @@
                                 </p:cTn>
                               </p:par>
                               <p:par>
-                                <p:cTn id="27" presetID="2" presetClass="entr" presetSubtype="4" fill="hold" nodeType="withEffect">
+                                <p:cTn id="27" presetID="2" presetClass="entr" presetSubtype="4" fill="hold" grpId="0" nodeType="withEffect">
                                   <p:stCondLst>
                                     <p:cond delay="0"/>
                                   </p:stCondLst>
@@ -11205,6 +11246,97 @@
                                           </p:stCondLst>
                                         </p:cTn>
                                         <p:tgtEl>
+                                          <p:spTgt spid="11"/>
+                                        </p:tgtEl>
+                                        <p:attrNameLst>
+                                          <p:attrName>style.visibility</p:attrName>
+                                        </p:attrNameLst>
+                                      </p:cBhvr>
+                                      <p:to>
+                                        <p:strVal val="visible"/>
+                                      </p:to>
+                                    </p:set>
+                                    <p:anim calcmode="lin" valueType="num">
+                                      <p:cBhvr additive="base">
+                                        <p:cTn id="35" dur="500" fill="hold"/>
+                                        <p:tgtEl>
+                                          <p:spTgt spid="11"/>
+                                        </p:tgtEl>
+                                        <p:attrNameLst>
+                                          <p:attrName>ppt_x</p:attrName>
+                                        </p:attrNameLst>
+                                      </p:cBhvr>
+                                      <p:tavLst>
+                                        <p:tav tm="0">
+                                          <p:val>
+                                            <p:strVal val="#ppt_x"/>
+                                          </p:val>
+                                        </p:tav>
+                                        <p:tav tm="100000">
+                                          <p:val>
+                                            <p:strVal val="#ppt_x"/>
+                                          </p:val>
+                                        </p:tav>
+                                      </p:tavLst>
+                                    </p:anim>
+                                    <p:anim calcmode="lin" valueType="num">
+                                      <p:cBhvr additive="base">
+                                        <p:cTn id="36" dur="500" fill="hold"/>
+                                        <p:tgtEl>
+                                          <p:spTgt spid="11"/>
+                                        </p:tgtEl>
+                                        <p:attrNameLst>
+                                          <p:attrName>ppt_y</p:attrName>
+                                        </p:attrNameLst>
+                                      </p:cBhvr>
+                                      <p:tavLst>
+                                        <p:tav tm="0">
+                                          <p:val>
+                                            <p:strVal val="1+#ppt_h/2"/>
+                                          </p:val>
+                                        </p:tav>
+                                        <p:tav tm="100000">
+                                          <p:val>
+                                            <p:strVal val="#ppt_y"/>
+                                          </p:val>
+                                        </p:tav>
+                                      </p:tavLst>
+                                    </p:anim>
+                                  </p:childTnLst>
+                                </p:cTn>
+                              </p:par>
+                            </p:childTnLst>
+                          </p:cTn>
+                        </p:par>
+                      </p:childTnLst>
+                    </p:cTn>
+                  </p:par>
+                  <p:par>
+                    <p:cTn id="37" fill="hold">
+                      <p:stCondLst>
+                        <p:cond delay="indefinite"/>
+                      </p:stCondLst>
+                      <p:childTnLst>
+                        <p:par>
+                          <p:cTn id="38" fill="hold">
+                            <p:stCondLst>
+                              <p:cond delay="0"/>
+                            </p:stCondLst>
+                            <p:childTnLst>
+                              <p:par>
+                                <p:cTn id="39" presetID="2" presetClass="entr" presetSubtype="4" fill="hold" grpId="0" nodeType="clickEffect">
+                                  <p:stCondLst>
+                                    <p:cond delay="0"/>
+                                  </p:stCondLst>
+                                  <p:childTnLst>
+                                    <p:set>
+                                      <p:cBhvr>
+                                        <p:cTn id="40" dur="1" fill="hold">
+                                          <p:stCondLst>
+                                            <p:cond delay="0"/>
+                                          </p:stCondLst>
+                                        </p:cTn>
+                                        <p:tgtEl>
                                           <p:spTgt spid="9">
                                             <p:txEl>
                                               <p:pRg st="2" end="2"/>
@@ -11221,7 +11353,7 @@
                                     </p:set>
                                     <p:anim calcmode="lin" valueType="num">
                                       <p:cBhvr additive="base">
-                                        <p:cTn id="35" dur="500" fill="hold"/>
+                                        <p:cTn id="41" dur="500" fill="hold"/>
                                         <p:tgtEl>
                                           <p:spTgt spid="9">
                                             <p:txEl>
@@ -11248,7 +11380,7 @@
                                     </p:anim>
                                     <p:anim calcmode="lin" valueType="num">
                                       <p:cBhvr additive="base">
-                                        <p:cTn id="36" dur="500" fill="hold"/>
+                                        <p:cTn id="42" dur="500" fill="hold"/>
                                         <p:tgtEl>
                                           <p:spTgt spid="9">
                                             <p:txEl>
@@ -11277,14 +11409,14 @@
                                 </p:cTn>
                               </p:par>
                               <p:par>
-                                <p:cTn id="37" presetID="2" presetClass="entr" presetSubtype="4" fill="hold" nodeType="withEffect">
+                                <p:cTn id="43" presetID="2" presetClass="entr" presetSubtype="4" fill="hold" nodeType="withEffect">
                                   <p:stCondLst>
                                     <p:cond delay="0"/>
                                   </p:stCondLst>
                                   <p:childTnLst>
                                     <p:set>
                                       <p:cBhvr>
-                                        <p:cTn id="38" dur="1" fill="hold">
+                                        <p:cTn id="44" dur="1" fill="hold">
                                           <p:stCondLst>
                                             <p:cond delay="0"/>
                                           </p:stCondLst>
@@ -11302,7 +11434,7 @@
                                     </p:set>
                                     <p:anim calcmode="lin" valueType="num">
                                       <p:cBhvr additive="base">
-                                        <p:cTn id="39" dur="500" fill="hold"/>
+                                        <p:cTn id="45" dur="500" fill="hold"/>
                                         <p:tgtEl>
                                           <p:spTgt spid="13"/>
                                         </p:tgtEl>
@@ -11325,7 +11457,7 @@
                                     </p:anim>
                                     <p:anim calcmode="lin" valueType="num">
                                       <p:cBhvr additive="base">
-                                        <p:cTn id="40" dur="500" fill="hold"/>
+                                        <p:cTn id="46" dur="500" fill="hold"/>
                                         <p:tgtEl>
                                           <p:spTgt spid="13"/>
                                         </p:tgtEl>
@@ -11356,26 +11488,26 @@
                     </p:cTn>
                   </p:par>
                   <p:par>
-                    <p:cTn id="41" fill="hold">
+                    <p:cTn id="47" fill="hold">
                       <p:stCondLst>
                         <p:cond delay="indefinite"/>
                       </p:stCondLst>
                       <p:childTnLst>
                         <p:par>
-                          <p:cTn id="42" fill="hold">
+                          <p:cTn id="48" fill="hold">
                             <p:stCondLst>
                               <p:cond delay="0"/>
                             </p:stCondLst>
                             <p:childTnLst>
                               <p:par>
-                                <p:cTn id="43" presetID="2" presetClass="entr" presetSubtype="4" fill="hold" nodeType="clickEffect">
+                                <p:cTn id="49" presetID="2" presetClass="entr" presetSubtype="4" fill="hold" grpId="0" nodeType="clickEffect">
                                   <p:stCondLst>
                                     <p:cond delay="0"/>
                                   </p:stCondLst>
                                   <p:childTnLst>
                                     <p:set>
                                       <p:cBhvr>
-                                        <p:cTn id="44" dur="1" fill="hold">
+                                        <p:cTn id="50" dur="1" fill="hold">
                                           <p:stCondLst>
                                             <p:cond delay="0"/>
                                           </p:stCondLst>
@@ -11397,7 +11529,7 @@
                                     </p:set>
                                     <p:anim calcmode="lin" valueType="num">
                                       <p:cBhvr additive="base">
-                                        <p:cTn id="45" dur="500" fill="hold"/>
+                                        <p:cTn id="51" dur="500" fill="hold"/>
                                         <p:tgtEl>
                                           <p:spTgt spid="9">
                                             <p:txEl>
@@ -11424,7 +11556,7 @@
                                     </p:anim>
                                     <p:anim calcmode="lin" valueType="num">
                                       <p:cBhvr additive="base">
-                                        <p:cTn id="46" dur="500" fill="hold"/>
+                                        <p:cTn id="52" dur="500" fill="hold"/>
                                         <p:tgtEl>
                                           <p:spTgt spid="9">
                                             <p:txEl>
@@ -11453,14 +11585,14 @@
                                 </p:cTn>
                               </p:par>
                               <p:par>
-                                <p:cTn id="47" presetID="2" presetClass="entr" presetSubtype="4" fill="hold" nodeType="withEffect">
+                                <p:cTn id="53" presetID="2" presetClass="entr" presetSubtype="4" fill="hold" nodeType="withEffect">
                                   <p:stCondLst>
                                     <p:cond delay="0"/>
                                   </p:stCondLst>
                                   <p:childTnLst>
                                     <p:set>
                                       <p:cBhvr>
-                                        <p:cTn id="48" dur="1" fill="hold">
+                                        <p:cTn id="54" dur="1" fill="hold">
                                           <p:stCondLst>
                                             <p:cond delay="0"/>
                                           </p:stCondLst>
@@ -11478,7 +11610,7 @@
                                     </p:set>
                                     <p:anim calcmode="lin" valueType="num">
                                       <p:cBhvr additive="base">
-                                        <p:cTn id="49" dur="500" fill="hold"/>
+                                        <p:cTn id="55" dur="500" fill="hold"/>
                                         <p:tgtEl>
                                           <p:spTgt spid="16"/>
                                         </p:tgtEl>
@@ -11501,7 +11633,7 @@
                                     </p:anim>
                                     <p:anim calcmode="lin" valueType="num">
                                       <p:cBhvr additive="base">
-                                        <p:cTn id="50" dur="500" fill="hold"/>
+                                        <p:cTn id="56" dur="500" fill="hold"/>
                                         <p:tgtEl>
                                           <p:spTgt spid="16"/>
                                         </p:tgtEl>
@@ -11532,26 +11664,26 @@
                     </p:cTn>
                   </p:par>
                   <p:par>
-                    <p:cTn id="51" fill="hold">
+                    <p:cTn id="57" fill="hold">
                       <p:stCondLst>
                         <p:cond delay="indefinite"/>
                       </p:stCondLst>
                       <p:childTnLst>
                         <p:par>
-                          <p:cTn id="52" fill="hold">
+                          <p:cTn id="58" fill="hold">
                             <p:stCondLst>
                               <p:cond delay="0"/>
                             </p:stCondLst>
                             <p:childTnLst>
                               <p:par>
-                                <p:cTn id="53" presetID="2" presetClass="entr" presetSubtype="4" fill="hold" nodeType="clickEffect">
+                                <p:cTn id="59" presetID="2" presetClass="entr" presetSubtype="4" fill="hold" nodeType="clickEffect">
                                   <p:stCondLst>
                                     <p:cond delay="0"/>
                                   </p:stCondLst>
                                   <p:childTnLst>
                                     <p:set>
                                       <p:cBhvr>
-                                        <p:cTn id="54" dur="1" fill="hold">
+                                        <p:cTn id="60" dur="1" fill="hold">
                                           <p:stCondLst>
                                             <p:cond delay="0"/>
                                           </p:stCondLst>
@@ -11569,7 +11701,7 @@
                                     </p:set>
                                     <p:anim calcmode="lin" valueType="num">
                                       <p:cBhvr additive="base">
-                                        <p:cTn id="55" dur="500" fill="hold"/>
+                                        <p:cTn id="61" dur="500" fill="hold"/>
                                         <p:tgtEl>
                                           <p:spTgt spid="18"/>
                                         </p:tgtEl>
@@ -11592,7 +11724,7 @@
                                     </p:anim>
                                     <p:anim calcmode="lin" valueType="num">
                                       <p:cBhvr additive="base">
-                                        <p:cTn id="56" dur="500" fill="hold"/>
+                                        <p:cTn id="62" dur="500" fill="hold"/>
                                         <p:tgtEl>
                                           <p:spTgt spid="18"/>
                                         </p:tgtEl>
@@ -11647,6 +11779,7 @@
       <p:bldP spid="5" grpId="0" animBg="1"/>
       <p:bldP spid="6" grpId="0"/>
       <p:bldP spid="7" grpId="0" animBg="1"/>
+      <p:bldP spid="9" grpId="0" uiExpand="1" build="allAtOnce" animBg="1"/>
     </p:bldLst>
   </p:timing>
 </p:sld>
@@ -11684,14 +11817,14 @@
           <a:ln/>
           <a:extLst>
             <a:ext uri="{909E8E84-426E-40dd-AFC4-6F175D3DCCD1}">
-              <a14:hiddenFill xmlns:a14="http://schemas.microsoft.com/office/drawing/2010/main" xmlns="">
+              <a14:hiddenFill xmlns="" xmlns:a14="http://schemas.microsoft.com/office/drawing/2010/main">
                 <a:solidFill>
                   <a:srgbClr val="FFFFFF"/>
                 </a:solidFill>
               </a14:hiddenFill>
             </a:ext>
             <a:ext uri="{91240B29-F687-4f45-9708-019B960494DF}">
-              <a14:hiddenLine xmlns:a14="http://schemas.microsoft.com/office/drawing/2010/main" xmlns="" w="9525">
+              <a14:hiddenLine xmlns="" xmlns:a14="http://schemas.microsoft.com/office/drawing/2010/main" w="9525">
                 <a:solidFill>
                   <a:srgbClr val="000000"/>
                 </a:solidFill>
@@ -11844,14 +11977,14 @@
           </a:ln>
           <a:extLst>
             <a:ext uri="{909E8E84-426E-40dd-AFC4-6F175D3DCCD1}">
-              <a14:hiddenFill xmlns:a14="http://schemas.microsoft.com/office/drawing/2010/main" xmlns="">
+              <a14:hiddenFill xmlns="" xmlns:a14="http://schemas.microsoft.com/office/drawing/2010/main">
                 <a:solidFill>
                   <a:srgbClr val="FFFFFF"/>
                 </a:solidFill>
               </a14:hiddenFill>
             </a:ext>
             <a:ext uri="{91240B29-F687-4f45-9708-019B960494DF}">
-              <a14:hiddenLine xmlns:a14="http://schemas.microsoft.com/office/drawing/2010/main" xmlns="" w="12700" cap="sq">
+              <a14:hiddenLine xmlns="" xmlns:a14="http://schemas.microsoft.com/office/drawing/2010/main" w="12700" cap="sq">
                 <a:solidFill>
                   <a:srgbClr val="000000"/>
                 </a:solidFill>
@@ -12011,7 +12144,7 @@
           </a:ln>
           <a:extLst>
             <a:ext uri="{91240B29-F687-4f45-9708-019B960494DF}">
-              <a14:hiddenLine xmlns:a14="http://schemas.microsoft.com/office/drawing/2010/main" xmlns="" w="12700" cap="sq">
+              <a14:hiddenLine xmlns="" xmlns:a14="http://schemas.microsoft.com/office/drawing/2010/main" w="12700" cap="sq">
                 <a:solidFill>
                   <a:srgbClr val="000000"/>
                 </a:solidFill>
@@ -12213,7 +12346,7 @@
           </a:ln>
           <a:extLst>
             <a:ext uri="{91240B29-F687-4f45-9708-019B960494DF}">
-              <a14:hiddenLine xmlns:a14="http://schemas.microsoft.com/office/drawing/2010/main" xmlns="" w="12700" cap="sq">
+              <a14:hiddenLine xmlns="" xmlns:a14="http://schemas.microsoft.com/office/drawing/2010/main" w="12700" cap="sq">
                 <a:solidFill>
                   <a:srgbClr val="000000"/>
                 </a:solidFill>
@@ -13188,14 +13321,14 @@
           <a:noFill/>
           <a:extLst>
             <a:ext uri="{909E8E84-426E-40dd-AFC4-6F175D3DCCD1}">
-              <a14:hiddenFill xmlns:a14="http://schemas.microsoft.com/office/drawing/2010/main" xmlns="">
+              <a14:hiddenFill xmlns="" xmlns:a14="http://schemas.microsoft.com/office/drawing/2010/main">
                 <a:solidFill>
                   <a:srgbClr val="FFFFFF"/>
                 </a:solidFill>
               </a14:hiddenFill>
             </a:ext>
             <a:ext uri="{91240B29-F687-4f45-9708-019B960494DF}">
-              <a14:hiddenLine xmlns:a14="http://schemas.microsoft.com/office/drawing/2010/main" xmlns="" w="9525">
+              <a14:hiddenLine xmlns="" xmlns:a14="http://schemas.microsoft.com/office/drawing/2010/main" w="9525">
                 <a:solidFill>
                   <a:srgbClr val="000000"/>
                 </a:solidFill>
@@ -13539,7 +13672,7 @@
           </a:ln>
           <a:extLst>
             <a:ext uri="{91240B29-F687-4f45-9708-019B960494DF}">
-              <a14:hiddenLine xmlns="" xmlns:a14="http://schemas.microsoft.com/office/drawing/2010/main" w="12700" cap="sq">
+              <a14:hiddenLine xmlns:a14="http://schemas.microsoft.com/office/drawing/2010/main" xmlns="" w="12700" cap="sq">
                 <a:solidFill>
                   <a:srgbClr val="000000"/>
                 </a:solidFill>
@@ -14443,14 +14576,14 @@
           <a:noFill/>
           <a:extLst>
             <a:ext uri="{909E8E84-426E-40dd-AFC4-6F175D3DCCD1}">
-              <a14:hiddenFill xmlns:a14="http://schemas.microsoft.com/office/drawing/2010/main" xmlns="">
+              <a14:hiddenFill xmlns="" xmlns:a14="http://schemas.microsoft.com/office/drawing/2010/main">
                 <a:solidFill>
                   <a:srgbClr val="FFFFFF"/>
                 </a:solidFill>
               </a14:hiddenFill>
             </a:ext>
             <a:ext uri="{91240B29-F687-4f45-9708-019B960494DF}">
-              <a14:hiddenLine xmlns:a14="http://schemas.microsoft.com/office/drawing/2010/main" xmlns="" w="9525">
+              <a14:hiddenLine xmlns="" xmlns:a14="http://schemas.microsoft.com/office/drawing/2010/main" w="9525">
                 <a:solidFill>
                   <a:srgbClr val="000000"/>
                 </a:solidFill>
@@ -15243,14 +15376,14 @@
           <a:noFill/>
           <a:extLst>
             <a:ext uri="{909E8E84-426E-40dd-AFC4-6F175D3DCCD1}">
-              <a14:hiddenFill xmlns="" xmlns:a14="http://schemas.microsoft.com/office/drawing/2010/main">
+              <a14:hiddenFill xmlns:a14="http://schemas.microsoft.com/office/drawing/2010/main" xmlns="">
                 <a:solidFill>
                   <a:srgbClr val="FFFFFF"/>
                 </a:solidFill>
               </a14:hiddenFill>
             </a:ext>
             <a:ext uri="{91240B29-F687-4f45-9708-019B960494DF}">
-              <a14:hiddenLine xmlns="" xmlns:a14="http://schemas.microsoft.com/office/drawing/2010/main" w="9525">
+              <a14:hiddenLine xmlns:a14="http://schemas.microsoft.com/office/drawing/2010/main" xmlns="" w="9525">
                 <a:solidFill>
                   <a:srgbClr val="000000"/>
                 </a:solidFill>
@@ -15594,7 +15727,7 @@
           </a:ln>
           <a:extLst>
             <a:ext uri="{91240B29-F687-4f45-9708-019B960494DF}">
-              <a14:hiddenLine xmlns:a14="http://schemas.microsoft.com/office/drawing/2010/main" xmlns="" w="12700" cap="sq">
+              <a14:hiddenLine xmlns="" xmlns:a14="http://schemas.microsoft.com/office/drawing/2010/main" w="12700" cap="sq">
                 <a:solidFill>
                   <a:srgbClr val="000000"/>
                 </a:solidFill>
@@ -15759,7 +15892,7 @@
           </a:ln>
           <a:extLst>
             <a:ext uri="{91240B29-F687-4f45-9708-019B960494DF}">
-              <a14:hiddenLine xmlns:a14="http://schemas.microsoft.com/office/drawing/2010/main" xmlns="" w="12700" cap="sq">
+              <a14:hiddenLine xmlns="" xmlns:a14="http://schemas.microsoft.com/office/drawing/2010/main" w="12700" cap="sq">
                 <a:solidFill>
                   <a:srgbClr val="000000"/>
                 </a:solidFill>
@@ -15928,7 +16061,7 @@
           </a:ln>
           <a:extLst>
             <a:ext uri="{91240B29-F687-4f45-9708-019B960494DF}">
-              <a14:hiddenLine xmlns:a14="http://schemas.microsoft.com/office/drawing/2010/main" xmlns="" w="12700" cap="sq">
+              <a14:hiddenLine xmlns="" xmlns:a14="http://schemas.microsoft.com/office/drawing/2010/main" w="12700" cap="sq">
                 <a:solidFill>
                   <a:srgbClr val="000000"/>
                 </a:solidFill>
@@ -16944,14 +17077,14 @@
           <a:ln/>
           <a:extLst>
             <a:ext uri="{909E8E84-426E-40dd-AFC4-6F175D3DCCD1}">
-              <a14:hiddenFill xmlns="" xmlns:a14="http://schemas.microsoft.com/office/drawing/2010/main">
+              <a14:hiddenFill xmlns:a14="http://schemas.microsoft.com/office/drawing/2010/main" xmlns="">
                 <a:solidFill>
                   <a:srgbClr val="FFFFFF"/>
                 </a:solidFill>
               </a14:hiddenFill>
             </a:ext>
             <a:ext uri="{91240B29-F687-4f45-9708-019B960494DF}">
-              <a14:hiddenLine xmlns="" xmlns:a14="http://schemas.microsoft.com/office/drawing/2010/main" w="9525">
+              <a14:hiddenLine xmlns:a14="http://schemas.microsoft.com/office/drawing/2010/main" xmlns="" w="9525">
                 <a:solidFill>
                   <a:srgbClr val="000000"/>
                 </a:solidFill>
@@ -17104,14 +17237,14 @@
           </a:ln>
           <a:extLst>
             <a:ext uri="{909E8E84-426E-40dd-AFC4-6F175D3DCCD1}">
-              <a14:hiddenFill xmlns="" xmlns:a14="http://schemas.microsoft.com/office/drawing/2010/main">
+              <a14:hiddenFill xmlns:a14="http://schemas.microsoft.com/office/drawing/2010/main" xmlns="">
                 <a:solidFill>
                   <a:srgbClr val="FFFFFF"/>
                 </a:solidFill>
               </a14:hiddenFill>
             </a:ext>
             <a:ext uri="{91240B29-F687-4f45-9708-019B960494DF}">
-              <a14:hiddenLine xmlns="" xmlns:a14="http://schemas.microsoft.com/office/drawing/2010/main" w="12700" cap="sq">
+              <a14:hiddenLine xmlns:a14="http://schemas.microsoft.com/office/drawing/2010/main" xmlns="" w="12700" cap="sq">
                 <a:solidFill>
                   <a:srgbClr val="000000"/>
                 </a:solidFill>
@@ -17257,7 +17390,7 @@
         </p:nvSpPr>
         <p:spPr bwMode="auto">
           <a:xfrm>
-            <a:off x="3192285" y="2008415"/>
+            <a:off x="3482379" y="2154119"/>
             <a:ext cx="5227242" cy="460191"/>
           </a:xfrm>
           <a:prstGeom prst="rect">
@@ -17271,7 +17404,7 @@
           </a:ln>
           <a:extLst>
             <a:ext uri="{91240B29-F687-4f45-9708-019B960494DF}">
-              <a14:hiddenLine xmlns="" xmlns:a14="http://schemas.microsoft.com/office/drawing/2010/main" w="12700" cap="sq">
+              <a14:hiddenLine xmlns:a14="http://schemas.microsoft.com/office/drawing/2010/main" xmlns="" w="12700" cap="sq">
                 <a:solidFill>
                   <a:srgbClr val="000000"/>
                 </a:solidFill>
@@ -17431,7 +17564,7 @@
           </a:ln>
           <a:extLst>
             <a:ext uri="{91240B29-F687-4f45-9708-019B960494DF}">
-              <a14:hiddenLine xmlns:lc="http://schemas.openxmlformats.org/drawingml/2006/lockedCanvas" xmlns:a14="http://schemas.microsoft.com/office/drawing/2010/main" xmlns="" w="12700" cap="sq">
+              <a14:hiddenLine xmlns="" xmlns:a14="http://schemas.microsoft.com/office/drawing/2010/main" xmlns:lc="http://schemas.openxmlformats.org/drawingml/2006/lockedCanvas" w="12700" cap="sq">
                 <a:solidFill>
                   <a:srgbClr val="000000"/>
                 </a:solidFill>
@@ -18913,14 +19046,14 @@
           <a:noFill/>
           <a:extLst>
             <a:ext uri="{909E8E84-426E-40dd-AFC4-6F175D3DCCD1}">
-              <a14:hiddenFill xmlns:a14="http://schemas.microsoft.com/office/drawing/2010/main" xmlns="">
+              <a14:hiddenFill xmlns="" xmlns:a14="http://schemas.microsoft.com/office/drawing/2010/main">
                 <a:solidFill>
                   <a:srgbClr val="FFFFFF"/>
                 </a:solidFill>
               </a14:hiddenFill>
             </a:ext>
             <a:ext uri="{91240B29-F687-4f45-9708-019B960494DF}">
-              <a14:hiddenLine xmlns:a14="http://schemas.microsoft.com/office/drawing/2010/main" xmlns="" w="9525">
+              <a14:hiddenLine xmlns="" xmlns:a14="http://schemas.microsoft.com/office/drawing/2010/main" w="9525">
                 <a:solidFill>
                   <a:srgbClr val="000000"/>
                 </a:solidFill>
@@ -19603,14 +19736,14 @@
           <a:noFill/>
           <a:extLst>
             <a:ext uri="{909E8E84-426E-40dd-AFC4-6F175D3DCCD1}">
-              <a14:hiddenFill xmlns="" xmlns:a14="http://schemas.microsoft.com/office/drawing/2010/main">
+              <a14:hiddenFill xmlns:a14="http://schemas.microsoft.com/office/drawing/2010/main" xmlns="">
                 <a:solidFill>
                   <a:srgbClr val="FFFFFF"/>
                 </a:solidFill>
               </a14:hiddenFill>
             </a:ext>
             <a:ext uri="{91240B29-F687-4f45-9708-019B960494DF}">
-              <a14:hiddenLine xmlns="" xmlns:a14="http://schemas.microsoft.com/office/drawing/2010/main" w="9525">
+              <a14:hiddenLine xmlns:a14="http://schemas.microsoft.com/office/drawing/2010/main" xmlns="" w="9525">
                 <a:solidFill>
                   <a:srgbClr val="000000"/>
                 </a:solidFill>
@@ -20475,14 +20608,14 @@
           <a:noFill/>
           <a:extLst>
             <a:ext uri="{909E8E84-426E-40dd-AFC4-6F175D3DCCD1}">
-              <a14:hiddenFill xmlns:a14="http://schemas.microsoft.com/office/drawing/2010/main" xmlns="">
+              <a14:hiddenFill xmlns="" xmlns:a14="http://schemas.microsoft.com/office/drawing/2010/main">
                 <a:solidFill>
                   <a:srgbClr val="FFFFFF"/>
                 </a:solidFill>
               </a14:hiddenFill>
             </a:ext>
             <a:ext uri="{91240B29-F687-4f45-9708-019B960494DF}">
-              <a14:hiddenLine xmlns:a14="http://schemas.microsoft.com/office/drawing/2010/main" xmlns="" w="9525">
+              <a14:hiddenLine xmlns="" xmlns:a14="http://schemas.microsoft.com/office/drawing/2010/main" w="9525">
                 <a:solidFill>
                   <a:srgbClr val="000000"/>
                 </a:solidFill>
@@ -20906,7 +21039,7 @@
           </a:ln>
           <a:extLst>
             <a:ext uri="{91240B29-F687-4f45-9708-019B960494DF}">
-              <a14:hiddenLine xmlns="" xmlns:a14="http://schemas.microsoft.com/office/drawing/2010/main" w="12700" cap="sq">
+              <a14:hiddenLine xmlns:a14="http://schemas.microsoft.com/office/drawing/2010/main" xmlns="" w="12700" cap="sq">
                 <a:solidFill>
                   <a:srgbClr val="000000"/>
                 </a:solidFill>
@@ -21067,7 +21200,7 @@
           </a:ln>
           <a:extLst>
             <a:ext uri="{91240B29-F687-4f45-9708-019B960494DF}">
-              <a14:hiddenLine xmlns="" xmlns:a14="http://schemas.microsoft.com/office/drawing/2010/main" w="12700" cap="sq">
+              <a14:hiddenLine xmlns:a14="http://schemas.microsoft.com/office/drawing/2010/main" xmlns="" w="12700" cap="sq">
                 <a:solidFill>
                   <a:srgbClr val="000000"/>
                 </a:solidFill>
@@ -21664,14 +21797,14 @@
           <a:noFill/>
           <a:extLst>
             <a:ext uri="{909E8E84-426E-40dd-AFC4-6F175D3DCCD1}">
-              <a14:hiddenFill xmlns:a14="http://schemas.microsoft.com/office/drawing/2010/main" xmlns="">
+              <a14:hiddenFill xmlns="" xmlns:a14="http://schemas.microsoft.com/office/drawing/2010/main">
                 <a:solidFill>
                   <a:srgbClr val="FFFFFF"/>
                 </a:solidFill>
               </a14:hiddenFill>
             </a:ext>
             <a:ext uri="{91240B29-F687-4f45-9708-019B960494DF}">
-              <a14:hiddenLine xmlns:a14="http://schemas.microsoft.com/office/drawing/2010/main" xmlns="" w="9525">
+              <a14:hiddenLine xmlns="" xmlns:a14="http://schemas.microsoft.com/office/drawing/2010/main" w="9525">
                 <a:solidFill>
                   <a:srgbClr val="000000"/>
                 </a:solidFill>
@@ -22104,7 +22237,7 @@
           </a:ln>
           <a:extLst>
             <a:ext uri="{91240B29-F687-4f45-9708-019B960494DF}">
-              <a14:hiddenLine xmlns="" xmlns:a14="http://schemas.microsoft.com/office/drawing/2010/main" w="12700" cap="sq">
+              <a14:hiddenLine xmlns:a14="http://schemas.microsoft.com/office/drawing/2010/main" xmlns="" w="12700" cap="sq">
                 <a:solidFill>
                   <a:srgbClr val="000000"/>
                 </a:solidFill>
@@ -22265,7 +22398,7 @@
           </a:ln>
           <a:extLst>
             <a:ext uri="{91240B29-F687-4f45-9708-019B960494DF}">
-              <a14:hiddenLine xmlns="" xmlns:a14="http://schemas.microsoft.com/office/drawing/2010/main" w="12700" cap="sq">
+              <a14:hiddenLine xmlns:a14="http://schemas.microsoft.com/office/drawing/2010/main" xmlns="" w="12700" cap="sq">
                 <a:solidFill>
                   <a:srgbClr val="000000"/>
                 </a:solidFill>
@@ -23257,14 +23390,14 @@
           <a:ln/>
           <a:extLst>
             <a:ext uri="{909E8E84-426E-40dd-AFC4-6F175D3DCCD1}">
-              <a14:hiddenFill xmlns="" xmlns:a14="http://schemas.microsoft.com/office/drawing/2010/main">
+              <a14:hiddenFill xmlns:a14="http://schemas.microsoft.com/office/drawing/2010/main" xmlns="">
                 <a:solidFill>
                   <a:srgbClr val="FFFFFF"/>
                 </a:solidFill>
               </a14:hiddenFill>
             </a:ext>
             <a:ext uri="{91240B29-F687-4f45-9708-019B960494DF}">
-              <a14:hiddenLine xmlns="" xmlns:a14="http://schemas.microsoft.com/office/drawing/2010/main" w="9525">
+              <a14:hiddenLine xmlns:a14="http://schemas.microsoft.com/office/drawing/2010/main" xmlns="" w="9525">
                 <a:solidFill>
                   <a:srgbClr val="000000"/>
                 </a:solidFill>
@@ -23417,14 +23550,14 @@
           </a:ln>
           <a:extLst>
             <a:ext uri="{909E8E84-426E-40dd-AFC4-6F175D3DCCD1}">
-              <a14:hiddenFill xmlns="" xmlns:a14="http://schemas.microsoft.com/office/drawing/2010/main">
+              <a14:hiddenFill xmlns:a14="http://schemas.microsoft.com/office/drawing/2010/main" xmlns="">
                 <a:solidFill>
                   <a:srgbClr val="FFFFFF"/>
                 </a:solidFill>
               </a14:hiddenFill>
             </a:ext>
             <a:ext uri="{91240B29-F687-4f45-9708-019B960494DF}">
-              <a14:hiddenLine xmlns="" xmlns:a14="http://schemas.microsoft.com/office/drawing/2010/main" w="12700" cap="sq">
+              <a14:hiddenLine xmlns:a14="http://schemas.microsoft.com/office/drawing/2010/main" xmlns="" w="12700" cap="sq">
                 <a:solidFill>
                   <a:srgbClr val="000000"/>
                 </a:solidFill>
@@ -23585,8 +23718,8 @@
         </p:nvSpPr>
         <p:spPr bwMode="auto">
           <a:xfrm>
-            <a:off x="2407443" y="2205855"/>
-            <a:ext cx="4718050" cy="461280"/>
+            <a:off x="2519362" y="2241512"/>
+            <a:ext cx="3688557" cy="461280"/>
           </a:xfrm>
           <a:prstGeom prst="rect">
             <a:avLst/>
@@ -23599,7 +23732,7 @@
           </a:ln>
           <a:extLst>
             <a:ext uri="{91240B29-F687-4f45-9708-019B960494DF}">
-              <a14:hiddenLine xmlns="" xmlns:a14="http://schemas.microsoft.com/office/drawing/2010/main" w="12700" cap="sq">
+              <a14:hiddenLine xmlns:a14="http://schemas.microsoft.com/office/drawing/2010/main" xmlns="" w="12700" cap="sq">
                 <a:solidFill>
                   <a:srgbClr val="000000"/>
                 </a:solidFill>
@@ -23837,7 +23970,7 @@
         <p:spPr bwMode="auto">
           <a:xfrm>
             <a:off x="2519362" y="4072644"/>
-            <a:ext cx="6419850" cy="869469"/>
+            <a:ext cx="4910138" cy="869469"/>
           </a:xfrm>
           <a:prstGeom prst="rect">
             <a:avLst/>
@@ -23850,7 +23983,7 @@
           </a:ln>
           <a:extLst>
             <a:ext uri="{91240B29-F687-4f45-9708-019B960494DF}">
-              <a14:hiddenLine xmlns="" xmlns:a14="http://schemas.microsoft.com/office/drawing/2010/main" w="12700" cap="sq">
+              <a14:hiddenLine xmlns:a14="http://schemas.microsoft.com/office/drawing/2010/main" xmlns="" w="12700" cap="sq">
                 <a:solidFill>
                   <a:srgbClr val="000000"/>
                 </a:solidFill>
@@ -24031,7 +24164,7 @@
         <p:spPr bwMode="auto">
           <a:xfrm>
             <a:off x="2519362" y="3186124"/>
-            <a:ext cx="4718050" cy="463204"/>
+            <a:ext cx="3344228" cy="463204"/>
           </a:xfrm>
           <a:prstGeom prst="rect">
             <a:avLst/>
@@ -24044,7 +24177,7 @@
           </a:ln>
           <a:extLst>
             <a:ext uri="{91240B29-F687-4f45-9708-019B960494DF}">
-              <a14:hiddenLine xmlns="" xmlns:a14="http://schemas.microsoft.com/office/drawing/2010/main" w="12700" cap="sq">
+              <a14:hiddenLine xmlns:a14="http://schemas.microsoft.com/office/drawing/2010/main" xmlns="" w="12700" cap="sq">
                 <a:solidFill>
                   <a:srgbClr val="000000"/>
                 </a:solidFill>
@@ -24227,7 +24360,7 @@
         <p:spPr bwMode="auto">
           <a:xfrm>
             <a:off x="2519362" y="5788745"/>
-            <a:ext cx="6419850" cy="869469"/>
+            <a:ext cx="4361498" cy="869469"/>
           </a:xfrm>
           <a:prstGeom prst="rect">
             <a:avLst/>
@@ -24240,7 +24373,7 @@
           </a:ln>
           <a:extLst>
             <a:ext uri="{91240B29-F687-4f45-9708-019B960494DF}">
-              <a14:hiddenLine xmlns="" xmlns:a14="http://schemas.microsoft.com/office/drawing/2010/main" w="12700" cap="sq">
+              <a14:hiddenLine xmlns:a14="http://schemas.microsoft.com/office/drawing/2010/main" xmlns="" w="12700" cap="sq">
                 <a:solidFill>
                   <a:srgbClr val="000000"/>
                 </a:solidFill>
@@ -25067,14 +25200,14 @@
           <a:ln/>
           <a:extLst>
             <a:ext uri="{909E8E84-426E-40dd-AFC4-6F175D3DCCD1}">
-              <a14:hiddenFill xmlns="" xmlns:a14="http://schemas.microsoft.com/office/drawing/2010/main">
+              <a14:hiddenFill xmlns:a14="http://schemas.microsoft.com/office/drawing/2010/main" xmlns="">
                 <a:solidFill>
                   <a:srgbClr val="FFFFFF"/>
                 </a:solidFill>
               </a14:hiddenFill>
             </a:ext>
             <a:ext uri="{91240B29-F687-4f45-9708-019B960494DF}">
-              <a14:hiddenLine xmlns="" xmlns:a14="http://schemas.microsoft.com/office/drawing/2010/main" w="9525">
+              <a14:hiddenLine xmlns:a14="http://schemas.microsoft.com/office/drawing/2010/main" xmlns="" w="9525">
                 <a:solidFill>
                   <a:srgbClr val="000000"/>
                 </a:solidFill>
@@ -25227,14 +25360,14 @@
           </a:ln>
           <a:extLst>
             <a:ext uri="{909E8E84-426E-40dd-AFC4-6F175D3DCCD1}">
-              <a14:hiddenFill xmlns="" xmlns:a14="http://schemas.microsoft.com/office/drawing/2010/main">
+              <a14:hiddenFill xmlns:a14="http://schemas.microsoft.com/office/drawing/2010/main" xmlns="">
                 <a:solidFill>
                   <a:srgbClr val="FFFFFF"/>
                 </a:solidFill>
               </a14:hiddenFill>
             </a:ext>
             <a:ext uri="{91240B29-F687-4f45-9708-019B960494DF}">
-              <a14:hiddenLine xmlns="" xmlns:a14="http://schemas.microsoft.com/office/drawing/2010/main" w="12700" cap="sq">
+              <a14:hiddenLine xmlns:a14="http://schemas.microsoft.com/office/drawing/2010/main" xmlns="" w="12700" cap="sq">
                 <a:solidFill>
                   <a:srgbClr val="000000"/>
                 </a:solidFill>
@@ -25394,7 +25527,7 @@
           </a:ln>
           <a:extLst>
             <a:ext uri="{91240B29-F687-4f45-9708-019B960494DF}">
-              <a14:hiddenLine xmlns="" xmlns:a14="http://schemas.microsoft.com/office/drawing/2010/main" w="12700" cap="sq">
+              <a14:hiddenLine xmlns:a14="http://schemas.microsoft.com/office/drawing/2010/main" xmlns="" w="12700" cap="sq">
                 <a:solidFill>
                   <a:srgbClr val="000000"/>
                 </a:solidFill>
@@ -25728,7 +25861,7 @@
                             </p:stCondLst>
                             <p:childTnLst>
                               <p:par>
-                                <p:cTn id="5" presetID="2" presetClass="entr" presetSubtype="4" fill="hold" nodeType="clickEffect">
+                                <p:cTn id="5" presetID="2" presetClass="entr" presetSubtype="4" fill="hold" grpId="0" nodeType="clickEffect">
                                   <p:stCondLst>
                                     <p:cond delay="0"/>
                                   </p:stCondLst>
@@ -25736,6 +25869,85 @@
                                     <p:set>
                                       <p:cBhvr>
                                         <p:cTn id="6" dur="1" fill="hold">
+                                          <p:stCondLst>
+                                            <p:cond delay="0"/>
+                                          </p:stCondLst>
+                                        </p:cTn>
+                                        <p:tgtEl>
+                                          <p:spTgt spid="38915">
+                                            <p:bg/>
+                                          </p:spTgt>
+                                        </p:tgtEl>
+                                        <p:attrNameLst>
+                                          <p:attrName>style.visibility</p:attrName>
+                                        </p:attrNameLst>
+                                      </p:cBhvr>
+                                      <p:to>
+                                        <p:strVal val="visible"/>
+                                      </p:to>
+                                    </p:set>
+                                    <p:anim calcmode="lin" valueType="num">
+                                      <p:cBhvr additive="base">
+                                        <p:cTn id="7" dur="500" fill="hold"/>
+                                        <p:tgtEl>
+                                          <p:spTgt spid="38915">
+                                            <p:bg/>
+                                          </p:spTgt>
+                                        </p:tgtEl>
+                                        <p:attrNameLst>
+                                          <p:attrName>ppt_x</p:attrName>
+                                        </p:attrNameLst>
+                                      </p:cBhvr>
+                                      <p:tavLst>
+                                        <p:tav tm="0">
+                                          <p:val>
+                                            <p:strVal val="#ppt_x"/>
+                                          </p:val>
+                                        </p:tav>
+                                        <p:tav tm="100000">
+                                          <p:val>
+                                            <p:strVal val="#ppt_x"/>
+                                          </p:val>
+                                        </p:tav>
+                                      </p:tavLst>
+                                    </p:anim>
+                                    <p:anim calcmode="lin" valueType="num">
+                                      <p:cBhvr additive="base">
+                                        <p:cTn id="8" dur="500" fill="hold"/>
+                                        <p:tgtEl>
+                                          <p:spTgt spid="38915">
+                                            <p:bg/>
+                                          </p:spTgt>
+                                        </p:tgtEl>
+                                        <p:attrNameLst>
+                                          <p:attrName>ppt_y</p:attrName>
+                                        </p:attrNameLst>
+                                      </p:cBhvr>
+                                      <p:tavLst>
+                                        <p:tav tm="0">
+                                          <p:val>
+                                            <p:strVal val="1+#ppt_h/2"/>
+                                          </p:val>
+                                        </p:tav>
+                                        <p:tav tm="100000">
+                                          <p:val>
+                                            <p:strVal val="#ppt_y"/>
+                                          </p:val>
+                                        </p:tav>
+                                      </p:tavLst>
+                                    </p:anim>
+                                  </p:childTnLst>
+                                </p:cTn>
+                              </p:par>
+                              <p:par>
+                                <p:cTn id="9" presetID="2" presetClass="entr" presetSubtype="4" fill="hold" grpId="0" nodeType="withEffect">
+                                  <p:stCondLst>
+                                    <p:cond delay="0"/>
+                                  </p:stCondLst>
+                                  <p:childTnLst>
+                                    <p:set>
+                                      <p:cBhvr>
+                                        <p:cTn id="10" dur="1" fill="hold">
                                           <p:stCondLst>
                                             <p:cond delay="0"/>
                                           </p:stCondLst>
@@ -25757,7 +25969,7 @@
                                     </p:set>
                                     <p:anim calcmode="lin" valueType="num">
                                       <p:cBhvr additive="base">
-                                        <p:cTn id="7" dur="500" fill="hold"/>
+                                        <p:cTn id="11" dur="500" fill="hold"/>
                                         <p:tgtEl>
                                           <p:spTgt spid="38915">
                                             <p:txEl>
@@ -25784,96 +25996,11 @@
                                     </p:anim>
                                     <p:anim calcmode="lin" valueType="num">
                                       <p:cBhvr additive="base">
-                                        <p:cTn id="8" dur="500" fill="hold"/>
+                                        <p:cTn id="12" dur="500" fill="hold"/>
                                         <p:tgtEl>
                                           <p:spTgt spid="38915">
                                             <p:txEl>
                                               <p:pRg st="0" end="0"/>
-                                            </p:txEl>
-                                          </p:spTgt>
-                                        </p:tgtEl>
-                                        <p:attrNameLst>
-                                          <p:attrName>ppt_y</p:attrName>
-                                        </p:attrNameLst>
-                                      </p:cBhvr>
-                                      <p:tavLst>
-                                        <p:tav tm="0">
-                                          <p:val>
-                                            <p:strVal val="1+#ppt_h/2"/>
-                                          </p:val>
-                                        </p:tav>
-                                        <p:tav tm="100000">
-                                          <p:val>
-                                            <p:strVal val="#ppt_y"/>
-                                          </p:val>
-                                        </p:tav>
-                                      </p:tavLst>
-                                    </p:anim>
-                                  </p:childTnLst>
-                                </p:cTn>
-                              </p:par>
-                              <p:par>
-                                <p:cTn id="9" presetID="2" presetClass="entr" presetSubtype="4" fill="hold" nodeType="withEffect">
-                                  <p:stCondLst>
-                                    <p:cond delay="0"/>
-                                  </p:stCondLst>
-                                  <p:childTnLst>
-                                    <p:set>
-                                      <p:cBhvr>
-                                        <p:cTn id="10" dur="1" fill="hold">
-                                          <p:stCondLst>
-                                            <p:cond delay="0"/>
-                                          </p:stCondLst>
-                                        </p:cTn>
-                                        <p:tgtEl>
-                                          <p:spTgt spid="38915">
-                                            <p:txEl>
-                                              <p:pRg st="1" end="1"/>
-                                            </p:txEl>
-                                          </p:spTgt>
-                                        </p:tgtEl>
-                                        <p:attrNameLst>
-                                          <p:attrName>style.visibility</p:attrName>
-                                        </p:attrNameLst>
-                                      </p:cBhvr>
-                                      <p:to>
-                                        <p:strVal val="visible"/>
-                                      </p:to>
-                                    </p:set>
-                                    <p:anim calcmode="lin" valueType="num">
-                                      <p:cBhvr additive="base">
-                                        <p:cTn id="11" dur="500" fill="hold"/>
-                                        <p:tgtEl>
-                                          <p:spTgt spid="38915">
-                                            <p:txEl>
-                                              <p:pRg st="1" end="1"/>
-                                            </p:txEl>
-                                          </p:spTgt>
-                                        </p:tgtEl>
-                                        <p:attrNameLst>
-                                          <p:attrName>ppt_x</p:attrName>
-                                        </p:attrNameLst>
-                                      </p:cBhvr>
-                                      <p:tavLst>
-                                        <p:tav tm="0">
-                                          <p:val>
-                                            <p:strVal val="#ppt_x"/>
-                                          </p:val>
-                                        </p:tav>
-                                        <p:tav tm="100000">
-                                          <p:val>
-                                            <p:strVal val="#ppt_x"/>
-                                          </p:val>
-                                        </p:tav>
-                                      </p:tavLst>
-                                    </p:anim>
-                                    <p:anim calcmode="lin" valueType="num">
-                                      <p:cBhvr additive="base">
-                                        <p:cTn id="12" dur="500" fill="hold"/>
-                                        <p:tgtEl>
-                                          <p:spTgt spid="38915">
-                                            <p:txEl>
-                                              <p:pRg st="1" end="1"/>
                                             </p:txEl>
                                           </p:spTgt>
                                         </p:tgtEl>
@@ -25916,7 +26043,7 @@
                             </p:stCondLst>
                             <p:childTnLst>
                               <p:par>
-                                <p:cTn id="15" presetID="2" presetClass="entr" presetSubtype="4" fill="hold" nodeType="clickEffect">
+                                <p:cTn id="15" presetID="2" presetClass="entr" presetSubtype="4" fill="hold" grpId="0" nodeType="clickEffect">
                                   <p:stCondLst>
                                     <p:cond delay="0"/>
                                   </p:stCondLst>
@@ -25924,6 +26051,109 @@
                                     <p:set>
                                       <p:cBhvr>
                                         <p:cTn id="16" dur="1" fill="hold">
+                                          <p:stCondLst>
+                                            <p:cond delay="0"/>
+                                          </p:stCondLst>
+                                        </p:cTn>
+                                        <p:tgtEl>
+                                          <p:spTgt spid="38915">
+                                            <p:txEl>
+                                              <p:pRg st="1" end="1"/>
+                                            </p:txEl>
+                                          </p:spTgt>
+                                        </p:tgtEl>
+                                        <p:attrNameLst>
+                                          <p:attrName>style.visibility</p:attrName>
+                                        </p:attrNameLst>
+                                      </p:cBhvr>
+                                      <p:to>
+                                        <p:strVal val="visible"/>
+                                      </p:to>
+                                    </p:set>
+                                    <p:anim calcmode="lin" valueType="num">
+                                      <p:cBhvr additive="base">
+                                        <p:cTn id="17" dur="500" fill="hold"/>
+                                        <p:tgtEl>
+                                          <p:spTgt spid="38915">
+                                            <p:txEl>
+                                              <p:pRg st="1" end="1"/>
+                                            </p:txEl>
+                                          </p:spTgt>
+                                        </p:tgtEl>
+                                        <p:attrNameLst>
+                                          <p:attrName>ppt_x</p:attrName>
+                                        </p:attrNameLst>
+                                      </p:cBhvr>
+                                      <p:tavLst>
+                                        <p:tav tm="0">
+                                          <p:val>
+                                            <p:strVal val="#ppt_x"/>
+                                          </p:val>
+                                        </p:tav>
+                                        <p:tav tm="100000">
+                                          <p:val>
+                                            <p:strVal val="#ppt_x"/>
+                                          </p:val>
+                                        </p:tav>
+                                      </p:tavLst>
+                                    </p:anim>
+                                    <p:anim calcmode="lin" valueType="num">
+                                      <p:cBhvr additive="base">
+                                        <p:cTn id="18" dur="500" fill="hold"/>
+                                        <p:tgtEl>
+                                          <p:spTgt spid="38915">
+                                            <p:txEl>
+                                              <p:pRg st="1" end="1"/>
+                                            </p:txEl>
+                                          </p:spTgt>
+                                        </p:tgtEl>
+                                        <p:attrNameLst>
+                                          <p:attrName>ppt_y</p:attrName>
+                                        </p:attrNameLst>
+                                      </p:cBhvr>
+                                      <p:tavLst>
+                                        <p:tav tm="0">
+                                          <p:val>
+                                            <p:strVal val="1+#ppt_h/2"/>
+                                          </p:val>
+                                        </p:tav>
+                                        <p:tav tm="100000">
+                                          <p:val>
+                                            <p:strVal val="#ppt_y"/>
+                                          </p:val>
+                                        </p:tav>
+                                      </p:tavLst>
+                                    </p:anim>
+                                  </p:childTnLst>
+                                </p:cTn>
+                              </p:par>
+                            </p:childTnLst>
+                          </p:cTn>
+                        </p:par>
+                      </p:childTnLst>
+                    </p:cTn>
+                  </p:par>
+                  <p:par>
+                    <p:cTn id="19" fill="hold">
+                      <p:stCondLst>
+                        <p:cond delay="indefinite"/>
+                      </p:stCondLst>
+                      <p:childTnLst>
+                        <p:par>
+                          <p:cTn id="20" fill="hold">
+                            <p:stCondLst>
+                              <p:cond delay="0"/>
+                            </p:stCondLst>
+                            <p:childTnLst>
+                              <p:par>
+                                <p:cTn id="21" presetID="2" presetClass="entr" presetSubtype="4" fill="hold" grpId="0" nodeType="clickEffect">
+                                  <p:stCondLst>
+                                    <p:cond delay="0"/>
+                                  </p:stCondLst>
+                                  <p:childTnLst>
+                                    <p:set>
+                                      <p:cBhvr>
+                                        <p:cTn id="22" dur="1" fill="hold">
                                           <p:stCondLst>
                                             <p:cond delay="0"/>
                                           </p:stCondLst>
@@ -25945,7 +26175,7 @@
                                     </p:set>
                                     <p:anim calcmode="lin" valueType="num">
                                       <p:cBhvr additive="base">
-                                        <p:cTn id="17" dur="500" fill="hold"/>
+                                        <p:cTn id="23" dur="500" fill="hold"/>
                                         <p:tgtEl>
                                           <p:spTgt spid="38915">
                                             <p:txEl>
@@ -25972,7 +26202,7 @@
                                     </p:anim>
                                     <p:anim calcmode="lin" valueType="num">
                                       <p:cBhvr additive="base">
-                                        <p:cTn id="18" dur="500" fill="hold"/>
+                                        <p:cTn id="24" dur="500" fill="hold"/>
                                         <p:tgtEl>
                                           <p:spTgt spid="38915">
                                             <p:txEl>
@@ -26000,15 +26230,33 @@
                                   </p:childTnLst>
                                 </p:cTn>
                               </p:par>
+                            </p:childTnLst>
+                          </p:cTn>
+                        </p:par>
+                      </p:childTnLst>
+                    </p:cTn>
+                  </p:par>
+                  <p:par>
+                    <p:cTn id="25" fill="hold">
+                      <p:stCondLst>
+                        <p:cond delay="indefinite"/>
+                      </p:stCondLst>
+                      <p:childTnLst>
+                        <p:par>
+                          <p:cTn id="26" fill="hold">
+                            <p:stCondLst>
+                              <p:cond delay="0"/>
+                            </p:stCondLst>
+                            <p:childTnLst>
                               <p:par>
-                                <p:cTn id="19" presetID="2" presetClass="entr" presetSubtype="4" fill="hold" nodeType="withEffect">
+                                <p:cTn id="27" presetID="2" presetClass="entr" presetSubtype="4" fill="hold" grpId="0" nodeType="clickEffect">
                                   <p:stCondLst>
                                     <p:cond delay="0"/>
                                   </p:stCondLst>
                                   <p:childTnLst>
                                     <p:set>
                                       <p:cBhvr>
-                                        <p:cTn id="20" dur="1" fill="hold">
+                                        <p:cTn id="28" dur="1" fill="hold">
                                           <p:stCondLst>
                                             <p:cond delay="0"/>
                                           </p:stCondLst>
@@ -26030,7 +26278,7 @@
                                     </p:set>
                                     <p:anim calcmode="lin" valueType="num">
                                       <p:cBhvr additive="base">
-                                        <p:cTn id="21" dur="500" fill="hold"/>
+                                        <p:cTn id="29" dur="500" fill="hold"/>
                                         <p:tgtEl>
                                           <p:spTgt spid="38915">
                                             <p:txEl>
@@ -26057,7 +26305,7 @@
                                     </p:anim>
                                     <p:anim calcmode="lin" valueType="num">
                                       <p:cBhvr additive="base">
-                                        <p:cTn id="22" dur="500" fill="hold"/>
+                                        <p:cTn id="30" dur="500" fill="hold"/>
                                         <p:tgtEl>
                                           <p:spTgt spid="38915">
                                             <p:txEl>
@@ -26092,26 +26340,26 @@
                     </p:cTn>
                   </p:par>
                   <p:par>
-                    <p:cTn id="23" fill="hold">
+                    <p:cTn id="31" fill="hold">
                       <p:stCondLst>
                         <p:cond delay="indefinite"/>
                       </p:stCondLst>
                       <p:childTnLst>
                         <p:par>
-                          <p:cTn id="24" fill="hold">
+                          <p:cTn id="32" fill="hold">
                             <p:stCondLst>
                               <p:cond delay="0"/>
                             </p:stCondLst>
                             <p:childTnLst>
                               <p:par>
-                                <p:cTn id="25" presetID="2" presetClass="entr" presetSubtype="4" fill="hold" nodeType="clickEffect">
+                                <p:cTn id="33" presetID="2" presetClass="entr" presetSubtype="4" fill="hold" grpId="0" nodeType="clickEffect">
                                   <p:stCondLst>
                                     <p:cond delay="0"/>
                                   </p:stCondLst>
                                   <p:childTnLst>
                                     <p:set>
                                       <p:cBhvr>
-                                        <p:cTn id="26" dur="1" fill="hold">
+                                        <p:cTn id="34" dur="1" fill="hold">
                                           <p:stCondLst>
                                             <p:cond delay="0"/>
                                           </p:stCondLst>
@@ -26133,7 +26381,7 @@
                                     </p:set>
                                     <p:anim calcmode="lin" valueType="num">
                                       <p:cBhvr additive="base">
-                                        <p:cTn id="27" dur="500" fill="hold"/>
+                                        <p:cTn id="35" dur="500" fill="hold"/>
                                         <p:tgtEl>
                                           <p:spTgt spid="38915">
                                             <p:txEl>
@@ -26160,7 +26408,7 @@
                                     </p:anim>
                                     <p:anim calcmode="lin" valueType="num">
                                       <p:cBhvr additive="base">
-                                        <p:cTn id="28" dur="500" fill="hold"/>
+                                        <p:cTn id="36" dur="500" fill="hold"/>
                                         <p:tgtEl>
                                           <p:spTgt spid="38915">
                                             <p:txEl>
@@ -26188,15 +26436,33 @@
                                   </p:childTnLst>
                                 </p:cTn>
                               </p:par>
+                            </p:childTnLst>
+                          </p:cTn>
+                        </p:par>
+                      </p:childTnLst>
+                    </p:cTn>
+                  </p:par>
+                  <p:par>
+                    <p:cTn id="37" fill="hold">
+                      <p:stCondLst>
+                        <p:cond delay="indefinite"/>
+                      </p:stCondLst>
+                      <p:childTnLst>
+                        <p:par>
+                          <p:cTn id="38" fill="hold">
+                            <p:stCondLst>
+                              <p:cond delay="0"/>
+                            </p:stCondLst>
+                            <p:childTnLst>
                               <p:par>
-                                <p:cTn id="29" presetID="2" presetClass="entr" presetSubtype="4" fill="hold" nodeType="withEffect">
+                                <p:cTn id="39" presetID="2" presetClass="entr" presetSubtype="4" fill="hold" grpId="0" nodeType="clickEffect">
                                   <p:stCondLst>
                                     <p:cond delay="0"/>
                                   </p:stCondLst>
                                   <p:childTnLst>
                                     <p:set>
                                       <p:cBhvr>
-                                        <p:cTn id="30" dur="1" fill="hold">
+                                        <p:cTn id="40" dur="1" fill="hold">
                                           <p:stCondLst>
                                             <p:cond delay="0"/>
                                           </p:stCondLst>
@@ -26218,7 +26484,7 @@
                                     </p:set>
                                     <p:anim calcmode="lin" valueType="num">
                                       <p:cBhvr additive="base">
-                                        <p:cTn id="31" dur="500" fill="hold"/>
+                                        <p:cTn id="41" dur="500" fill="hold"/>
                                         <p:tgtEl>
                                           <p:spTgt spid="38915">
                                             <p:txEl>
@@ -26245,7 +26511,7 @@
                                     </p:anim>
                                     <p:anim calcmode="lin" valueType="num">
                                       <p:cBhvr additive="base">
-                                        <p:cTn id="32" dur="500" fill="hold"/>
+                                        <p:cTn id="42" dur="500" fill="hold"/>
                                         <p:tgtEl>
                                           <p:spTgt spid="38915">
                                             <p:txEl>
@@ -26280,26 +26546,26 @@
                     </p:cTn>
                   </p:par>
                   <p:par>
-                    <p:cTn id="33" fill="hold">
+                    <p:cTn id="43" fill="hold">
                       <p:stCondLst>
                         <p:cond delay="indefinite"/>
                       </p:stCondLst>
                       <p:childTnLst>
                         <p:par>
-                          <p:cTn id="34" fill="hold">
+                          <p:cTn id="44" fill="hold">
                             <p:stCondLst>
                               <p:cond delay="0"/>
                             </p:stCondLst>
                             <p:childTnLst>
                               <p:par>
-                                <p:cTn id="35" presetID="2" presetClass="entr" presetSubtype="4" fill="hold" grpId="0" nodeType="clickEffect">
+                                <p:cTn id="45" presetID="2" presetClass="entr" presetSubtype="4" fill="hold" grpId="0" nodeType="clickEffect">
                                   <p:stCondLst>
                                     <p:cond delay="0"/>
                                   </p:stCondLst>
                                   <p:childTnLst>
                                     <p:set>
                                       <p:cBhvr>
-                                        <p:cTn id="36" dur="1" fill="hold">
+                                        <p:cTn id="46" dur="1" fill="hold">
                                           <p:stCondLst>
                                             <p:cond delay="0"/>
                                           </p:stCondLst>
@@ -26317,7 +26583,7 @@
                                     </p:set>
                                     <p:anim calcmode="lin" valueType="num">
                                       <p:cBhvr additive="base">
-                                        <p:cTn id="37" dur="500" fill="hold"/>
+                                        <p:cTn id="47" dur="500" fill="hold"/>
                                         <p:tgtEl>
                                           <p:spTgt spid="12"/>
                                         </p:tgtEl>
@@ -26340,7 +26606,7 @@
                                     </p:anim>
                                     <p:anim calcmode="lin" valueType="num">
                                       <p:cBhvr additive="base">
-                                        <p:cTn id="38" dur="500" fill="hold"/>
+                                        <p:cTn id="48" dur="500" fill="hold"/>
                                         <p:tgtEl>
                                           <p:spTgt spid="12"/>
                                         </p:tgtEl>
@@ -26392,6 +26658,7 @@
       </p:par>
     </p:tnLst>
     <p:bldLst>
+      <p:bldP spid="38915" grpId="0" uiExpand="1" build="allAtOnce" animBg="1"/>
       <p:bldP spid="12" grpId="0"/>
     </p:bldLst>
   </p:timing>
